--- a/generated/Tier 1 Broker Scorecards/Smart Start_Broker_Scorecard.pptx
+++ b/generated/Tier 1 Broker Scorecards/Smart Start_Broker_Scorecard.pptx
@@ -3357,7 +3357,7 @@
                         <a:rPr sz="800">
                           <a:latin typeface="Segoe UI"/>
                         </a:rPr>
-                        <a:t>$1,813,164.60 / $1,965,389.89 / $701,091.47</a:t>
+                        <a:t>$1,813,164.60 / $1,963,656.56 / $699,358.14</a:t>
                       </a:r>
                     </a:p>
                   </a:txBody>
@@ -3394,7 +3394,7 @@
                         <a:rPr sz="900">
                           <a:latin typeface="Segoe UI"/>
                         </a:rPr>
-                        <a:t>Tier 1  |  10.18% / 15.00%</a:t>
+                        <a:t>Tier 1  |  9.42% / 15.00%</a:t>
                       </a:r>
                     </a:p>
                   </a:txBody>
@@ -3653,7 +3653,7 @@
                         <a:rPr sz="900">
                           <a:latin typeface="Segoe UI"/>
                         </a:rPr>
-                        <a:t>Fleet Subs: 20  |  Binds: 2</a:t>
+                        <a:t>Fleet Subs: 21  |  Binds: 2</a:t>
                       </a:r>
                     </a:p>
                   </a:txBody>
@@ -3690,7 +3690,7 @@
                         <a:rPr sz="900">
                           <a:latin typeface="Segoe UI"/>
                         </a:rPr>
-                        <a:t>Fleet Bound Premium: $202,343.59</a:t>
+                        <a:t>Fleet Bound Premium: $224,267.68</a:t>
                       </a:r>
                     </a:p>
                   </a:txBody>
@@ -3727,7 +3727,7 @@
                         <a:rPr sz="900">
                           <a:latin typeface="Segoe UI"/>
                         </a:rPr>
-                        <a:t>Fleet Book %: 28.9%</a:t>
+                        <a:t>Fleet Book %: 32.1%</a:t>
                       </a:r>
                     </a:p>
                   </a:txBody>
@@ -3766,7 +3766,7 @@
                         <a:rPr sz="900">
                           <a:latin typeface="Segoe UI"/>
                         </a:rPr>
-                        <a:t>Non-Fleet Subs: 255  |  Binds: 26</a:t>
+                        <a:t>Non-Fleet Subs: 255  |  Binds: 24</a:t>
                       </a:r>
                     </a:p>
                   </a:txBody>
@@ -3803,7 +3803,7 @@
                         <a:rPr sz="900">
                           <a:latin typeface="Segoe UI"/>
                         </a:rPr>
-                        <a:t>Non-Fleet Bound Premium: $498,747.88</a:t>
+                        <a:t>Non-Fleet Bound Premium: $475,090.46</a:t>
                       </a:r>
                     </a:p>
                   </a:txBody>
@@ -3840,7 +3840,7 @@
                         <a:rPr sz="900">
                           <a:latin typeface="Segoe UI"/>
                         </a:rPr>
-                        <a:t>Non-Fleet Book %: 71.1%</a:t>
+                        <a:t>Non-Fleet Book %: 67.9%</a:t>
                       </a:r>
                     </a:p>
                   </a:txBody>
@@ -4428,7 +4428,7 @@
                           </a:solidFill>
                           <a:latin typeface="Segoe UI"/>
                         </a:rPr>
-                        <a:t>43</a:t>
+                        <a:t>44</a:t>
                       </a:r>
                     </a:p>
                   </a:txBody>
@@ -4707,7 +4707,7 @@
                           </a:solidFill>
                           <a:latin typeface="Segoe UI"/>
                         </a:rPr>
-                        <a:t>4.7%</a:t>
+                        <a:t>9.1%</a:t>
                       </a:r>
                     </a:p>
                   </a:txBody>
@@ -4980,7 +4980,7 @@
                           </a:solidFill>
                           <a:latin typeface="Segoe UI"/>
                         </a:rPr>
-                        <a:t>2</a:t>
+                        <a:t>4</a:t>
                       </a:r>
                     </a:p>
                   </a:txBody>
@@ -5259,7 +5259,7 @@
                           </a:solidFill>
                           <a:latin typeface="Segoe UI"/>
                         </a:rPr>
-                        <a:t>$140.2K</a:t>
+                        <a:t>$138.5K</a:t>
                       </a:r>
                     </a:p>
                   </a:txBody>

--- a/generated/Tier 1 Broker Scorecards/Smart Start_Broker_Scorecard.pptx
+++ b/generated/Tier 1 Broker Scorecards/Smart Start_Broker_Scorecard.pptx
@@ -3394,7 +3394,7 @@
                         <a:rPr sz="900">
                           <a:latin typeface="Segoe UI"/>
                         </a:rPr>
-                        <a:t>Tier 1  |  9.42% / 15.00%</a:t>
+                        <a:t>Tier 1  |  10.07% / 15.00%</a:t>
                       </a:r>
                     </a:p>
                   </a:txBody>
@@ -3653,7 +3653,7 @@
                         <a:rPr sz="900">
                           <a:latin typeface="Segoe UI"/>
                         </a:rPr>
-                        <a:t>Fleet Subs: 21  |  Binds: 2</a:t>
+                        <a:t>Fleet Subs: 20  |  Binds: 2</a:t>
                       </a:r>
                     </a:p>
                   </a:txBody>
@@ -3690,7 +3690,7 @@
                         <a:rPr sz="900">
                           <a:latin typeface="Segoe UI"/>
                         </a:rPr>
-                        <a:t>Fleet Bound Premium: $224,267.68</a:t>
+                        <a:t>Fleet Bound Premium: $202,483.45</a:t>
                       </a:r>
                     </a:p>
                   </a:txBody>
@@ -3727,7 +3727,7 @@
                         <a:rPr sz="900">
                           <a:latin typeface="Segoe UI"/>
                         </a:rPr>
-                        <a:t>Fleet Book %: 32.1%</a:t>
+                        <a:t>Fleet Book %: 29.0%</a:t>
                       </a:r>
                     </a:p>
                   </a:txBody>
@@ -3766,7 +3766,7 @@
                         <a:rPr sz="900">
                           <a:latin typeface="Segoe UI"/>
                         </a:rPr>
-                        <a:t>Non-Fleet Subs: 255  |  Binds: 24</a:t>
+                        <a:t>Non-Fleet Subs: 258  |  Binds: 26</a:t>
                       </a:r>
                     </a:p>
                   </a:txBody>
@@ -3803,7 +3803,7 @@
                         <a:rPr sz="900">
                           <a:latin typeface="Segoe UI"/>
                         </a:rPr>
-                        <a:t>Non-Fleet Bound Premium: $475,090.46</a:t>
+                        <a:t>Non-Fleet Bound Premium: $496,874.69</a:t>
                       </a:r>
                     </a:p>
                   </a:txBody>
@@ -3840,7 +3840,7 @@
                         <a:rPr sz="900">
                           <a:latin typeface="Segoe UI"/>
                         </a:rPr>
-                        <a:t>Non-Fleet Book %: 67.9%</a:t>
+                        <a:t>Non-Fleet Book %: 71.0%</a:t>
                       </a:r>
                     </a:p>
                   </a:txBody>
@@ -4428,7 +4428,7 @@
                           </a:solidFill>
                           <a:latin typeface="Segoe UI"/>
                         </a:rPr>
-                        <a:t>44</a:t>
+                        <a:t>46</a:t>
                       </a:r>
                     </a:p>
                   </a:txBody>
@@ -4707,7 +4707,7 @@
                           </a:solidFill>
                           <a:latin typeface="Segoe UI"/>
                         </a:rPr>
-                        <a:t>9.1%</a:t>
+                        <a:t>13.0%</a:t>
                       </a:r>
                     </a:p>
                   </a:txBody>
@@ -4747,7 +4747,7 @@
                         <a:rPr sz="800">
                           <a:latin typeface="Segoe UI"/>
                         </a:rPr>
-                        <a:t>20.7%</a:t>
+                        <a:t>19.5%</a:t>
                       </a:r>
                     </a:p>
                   </a:txBody>
@@ -4980,7 +4980,7 @@
                           </a:solidFill>
                           <a:latin typeface="Segoe UI"/>
                         </a:rPr>
-                        <a:t>4</a:t>
+                        <a:t>6</a:t>
                       </a:r>
                     </a:p>
                   </a:txBody>
@@ -5017,7 +5017,7 @@
                         <a:rPr sz="800">
                           <a:latin typeface="Segoe UI"/>
                         </a:rPr>
-                        <a:t>18</a:t>
+                        <a:t>17</a:t>
                       </a:r>
                     </a:p>
                   </a:txBody>

--- a/generated/Tier 1 Broker Scorecards/Smart Start_Broker_Scorecard.pptx
+++ b/generated/Tier 1 Broker Scorecards/Smart Start_Broker_Scorecard.pptx
@@ -3357,7 +3357,7 @@
                         <a:rPr sz="800">
                           <a:latin typeface="Segoe UI"/>
                         </a:rPr>
-                        <a:t>$1,813,164.60 / $1,963,656.56 / $699,358.14</a:t>
+                        <a:t>$1,813,164.60 / $1,953,713.74 / $689,415.32</a:t>
                       </a:r>
                     </a:p>
                   </a:txBody>
@@ -3394,7 +3394,7 @@
                         <a:rPr sz="900">
                           <a:latin typeface="Segoe UI"/>
                         </a:rPr>
-                        <a:t>Tier 1  |  10.07% / 15.00%</a:t>
+                        <a:t>Tier 1  |  10.00% / 15.00%</a:t>
                       </a:r>
                     </a:p>
                   </a:txBody>
@@ -3431,7 +3431,7 @@
                         <a:rPr sz="900">
                           <a:latin typeface="Segoe UI"/>
                         </a:rPr>
-                        <a:t>$2,538,430.44  (27.6% achieved)</a:t>
+                        <a:t>$2,538,430.44  (27.2% achieved)</a:t>
                       </a:r>
                     </a:p>
                   </a:txBody>
@@ -3690,7 +3690,7 @@
                         <a:rPr sz="900">
                           <a:latin typeface="Segoe UI"/>
                         </a:rPr>
-                        <a:t>Fleet Bound Premium: $202,483.45</a:t>
+                        <a:t>Fleet Bound Premium: $197,380.85</a:t>
                       </a:r>
                     </a:p>
                   </a:txBody>
@@ -3727,7 +3727,7 @@
                         <a:rPr sz="900">
                           <a:latin typeface="Segoe UI"/>
                         </a:rPr>
-                        <a:t>Fleet Book %: 29.0%</a:t>
+                        <a:t>Fleet Book %: 28.6%</a:t>
                       </a:r>
                     </a:p>
                   </a:txBody>
@@ -3766,7 +3766,7 @@
                         <a:rPr sz="900">
                           <a:latin typeface="Segoe UI"/>
                         </a:rPr>
-                        <a:t>Non-Fleet Subs: 258  |  Binds: 26</a:t>
+                        <a:t>Non-Fleet Subs: 260  |  Binds: 26</a:t>
                       </a:r>
                     </a:p>
                   </a:txBody>
@@ -3803,7 +3803,7 @@
                         <a:rPr sz="900">
                           <a:latin typeface="Segoe UI"/>
                         </a:rPr>
-                        <a:t>Non-Fleet Bound Premium: $496,874.69</a:t>
+                        <a:t>Non-Fleet Bound Premium: $492,034.47</a:t>
                       </a:r>
                     </a:p>
                   </a:txBody>
@@ -3840,7 +3840,7 @@
                         <a:rPr sz="900">
                           <a:latin typeface="Segoe UI"/>
                         </a:rPr>
-                        <a:t>Non-Fleet Book %: 71.0%</a:t>
+                        <a:t>Non-Fleet Book %: 71.4%</a:t>
                       </a:r>
                     </a:p>
                   </a:txBody>
@@ -4428,7 +4428,7 @@
                           </a:solidFill>
                           <a:latin typeface="Segoe UI"/>
                         </a:rPr>
-                        <a:t>46</a:t>
+                        <a:t>48</a:t>
                       </a:r>
                     </a:p>
                   </a:txBody>
@@ -4624,7 +4624,7 @@
                           </a:solidFill>
                           <a:latin typeface="Segoe UI"/>
                         </a:rPr>
-                        <a:t>12.5%</a:t>
+                        <a:t>13.6%</a:t>
                       </a:r>
                     </a:p>
                   </a:txBody>
@@ -4707,7 +4707,7 @@
                           </a:solidFill>
                           <a:latin typeface="Segoe UI"/>
                         </a:rPr>
-                        <a:t>13.0%</a:t>
+                        <a:t>12.5%</a:t>
                       </a:r>
                     </a:p>
                   </a:txBody>
@@ -4747,7 +4747,7 @@
                         <a:rPr sz="800">
                           <a:latin typeface="Segoe UI"/>
                         </a:rPr>
-                        <a:t>19.5%</a:t>
+                        <a:t>20.7%</a:t>
                       </a:r>
                     </a:p>
                   </a:txBody>
@@ -4901,9 +4901,12 @@
                       <a:pPr algn="ctr"/>
                       <a:r>
                         <a:rPr sz="800">
+                          <a:solidFill>
+                            <a:srgbClr val="059669"/>
+                          </a:solidFill>
                           <a:latin typeface="Segoe UI"/>
                         </a:rPr>
-                        <a:t>11</a:t>
+                        <a:t>12</a:t>
                       </a:r>
                     </a:p>
                   </a:txBody>
@@ -5017,7 +5020,7 @@
                         <a:rPr sz="800">
                           <a:latin typeface="Segoe UI"/>
                         </a:rPr>
-                        <a:t>17</a:t>
+                        <a:t>18</a:t>
                       </a:r>
                     </a:p>
                   </a:txBody>
@@ -5259,7 +5262,7 @@
                           </a:solidFill>
                           <a:latin typeface="Segoe UI"/>
                         </a:rPr>
-                        <a:t>$138.5K</a:t>
+                        <a:t>$128.6K</a:t>
                       </a:r>
                     </a:p>
                   </a:txBody>

--- a/generated/Tier 1 Broker Scorecards/Smart Start_Broker_Scorecard.pptx
+++ b/generated/Tier 1 Broker Scorecards/Smart Start_Broker_Scorecard.pptx
@@ -3394,7 +3394,7 @@
                         <a:rPr sz="900">
                           <a:latin typeface="Segoe UI"/>
                         </a:rPr>
-                        <a:t>Tier 1  |  10.00% / 15.00%</a:t>
+                        <a:t>Tier 1  |  9.86% / 15.00%</a:t>
                       </a:r>
                     </a:p>
                   </a:txBody>
@@ -3653,7 +3653,7 @@
                         <a:rPr sz="900">
                           <a:latin typeface="Segoe UI"/>
                         </a:rPr>
-                        <a:t>Fleet Subs: 20  |  Binds: 2</a:t>
+                        <a:t>Fleet Subs: 21  |  Binds: 2</a:t>
                       </a:r>
                     </a:p>
                   </a:txBody>
@@ -3766,7 +3766,7 @@
                         <a:rPr sz="900">
                           <a:latin typeface="Segoe UI"/>
                         </a:rPr>
-                        <a:t>Non-Fleet Subs: 260  |  Binds: 26</a:t>
+                        <a:t>Non-Fleet Subs: 263  |  Binds: 26</a:t>
                       </a:r>
                     </a:p>
                   </a:txBody>
@@ -4428,7 +4428,7 @@
                           </a:solidFill>
                           <a:latin typeface="Segoe UI"/>
                         </a:rPr>
-                        <a:t>48</a:t>
+                        <a:t>53</a:t>
                       </a:r>
                     </a:p>
                   </a:txBody>
@@ -4707,7 +4707,7 @@
                           </a:solidFill>
                           <a:latin typeface="Segoe UI"/>
                         </a:rPr>
-                        <a:t>12.5%</a:t>
+                        <a:t>11.3%</a:t>
                       </a:r>
                     </a:p>
                   </a:txBody>
@@ -4747,7 +4747,7 @@
                         <a:rPr sz="800">
                           <a:latin typeface="Segoe UI"/>
                         </a:rPr>
-                        <a:t>20.7%</a:t>
+                        <a:t>19.5%</a:t>
                       </a:r>
                     </a:p>
                   </a:txBody>
@@ -5020,7 +5020,7 @@
                         <a:rPr sz="800">
                           <a:latin typeface="Segoe UI"/>
                         </a:rPr>
-                        <a:t>18</a:t>
+                        <a:t>17</a:t>
                       </a:r>
                     </a:p>
                   </a:txBody>

--- a/generated/Tier 1 Broker Scorecards/Smart Start_Broker_Scorecard.pptx
+++ b/generated/Tier 1 Broker Scorecards/Smart Start_Broker_Scorecard.pptx
@@ -3394,7 +3394,7 @@
                         <a:rPr sz="900">
                           <a:latin typeface="Segoe UI"/>
                         </a:rPr>
-                        <a:t>Tier 1  |  9.86% / 15.00%</a:t>
+                        <a:t>Tier 1  |  9.12% / 15.00%</a:t>
                       </a:r>
                     </a:p>
                   </a:txBody>
@@ -3690,7 +3690,7 @@
                         <a:rPr sz="900">
                           <a:latin typeface="Segoe UI"/>
                         </a:rPr>
-                        <a:t>Fleet Bound Premium: $197,380.85</a:t>
+                        <a:t>Fleet Bound Premium: $226,852.57</a:t>
                       </a:r>
                     </a:p>
                   </a:txBody>
@@ -3727,7 +3727,7 @@
                         <a:rPr sz="900">
                           <a:latin typeface="Segoe UI"/>
                         </a:rPr>
-                        <a:t>Fleet Book %: 28.6%</a:t>
+                        <a:t>Fleet Book %: 32.9%</a:t>
                       </a:r>
                     </a:p>
                   </a:txBody>
@@ -3766,7 +3766,7 @@
                         <a:rPr sz="900">
                           <a:latin typeface="Segoe UI"/>
                         </a:rPr>
-                        <a:t>Non-Fleet Subs: 263  |  Binds: 26</a:t>
+                        <a:t>Non-Fleet Subs: 264  |  Binds: 24</a:t>
                       </a:r>
                     </a:p>
                   </a:txBody>
@@ -3803,7 +3803,7 @@
                         <a:rPr sz="900">
                           <a:latin typeface="Segoe UI"/>
                         </a:rPr>
-                        <a:t>Non-Fleet Bound Premium: $492,034.47</a:t>
+                        <a:t>Non-Fleet Bound Premium: $462,562.75</a:t>
                       </a:r>
                     </a:p>
                   </a:txBody>
@@ -3840,7 +3840,7 @@
                         <a:rPr sz="900">
                           <a:latin typeface="Segoe UI"/>
                         </a:rPr>
-                        <a:t>Non-Fleet Book %: 71.4%</a:t>
+                        <a:t>Non-Fleet Book %: 67.1%</a:t>
                       </a:r>
                     </a:p>
                   </a:txBody>
@@ -4428,7 +4428,7 @@
                           </a:solidFill>
                           <a:latin typeface="Segoe UI"/>
                         </a:rPr>
-                        <a:t>53</a:t>
+                        <a:t>55</a:t>
                       </a:r>
                     </a:p>
                   </a:txBody>
@@ -4707,7 +4707,7 @@
                           </a:solidFill>
                           <a:latin typeface="Segoe UI"/>
                         </a:rPr>
-                        <a:t>11.3%</a:t>
+                        <a:t>10.9%</a:t>
                       </a:r>
                     </a:p>
                   </a:txBody>

--- a/generated/Tier 1 Broker Scorecards/Smart Start_Broker_Scorecard.pptx
+++ b/generated/Tier 1 Broker Scorecards/Smart Start_Broker_Scorecard.pptx
@@ -3690,7 +3690,7 @@
                         <a:rPr sz="900">
                           <a:latin typeface="Segoe UI"/>
                         </a:rPr>
-                        <a:t>Fleet Bound Premium: $226,852.57</a:t>
+                        <a:t>Fleet Bound Premium: $222,168.42</a:t>
                       </a:r>
                     </a:p>
                   </a:txBody>
@@ -3727,7 +3727,7 @@
                         <a:rPr sz="900">
                           <a:latin typeface="Segoe UI"/>
                         </a:rPr>
-                        <a:t>Fleet Book %: 32.9%</a:t>
+                        <a:t>Fleet Book %: 32.2%</a:t>
                       </a:r>
                     </a:p>
                   </a:txBody>
@@ -3803,7 +3803,7 @@
                         <a:rPr sz="900">
                           <a:latin typeface="Segoe UI"/>
                         </a:rPr>
-                        <a:t>Non-Fleet Bound Premium: $462,562.75</a:t>
+                        <a:t>Non-Fleet Bound Premium: $467,246.90</a:t>
                       </a:r>
                     </a:p>
                   </a:txBody>
@@ -3840,7 +3840,7 @@
                         <a:rPr sz="900">
                           <a:latin typeface="Segoe UI"/>
                         </a:rPr>
-                        <a:t>Non-Fleet Book %: 67.1%</a:t>
+                        <a:t>Non-Fleet Book %: 67.8%</a:t>
                       </a:r>
                     </a:p>
                   </a:txBody>
@@ -4747,7 +4747,7 @@
                         <a:rPr sz="800">
                           <a:latin typeface="Segoe UI"/>
                         </a:rPr>
-                        <a:t>19.5%</a:t>
+                        <a:t>20.7%</a:t>
                       </a:r>
                     </a:p>
                   </a:txBody>
@@ -5020,7 +5020,7 @@
                         <a:rPr sz="800">
                           <a:latin typeface="Segoe UI"/>
                         </a:rPr>
-                        <a:t>17</a:t>
+                        <a:t>18</a:t>
                       </a:r>
                     </a:p>
                   </a:txBody>

--- a/generated/Tier 1 Broker Scorecards/Smart Start_Broker_Scorecard.pptx
+++ b/generated/Tier 1 Broker Scorecards/Smart Start_Broker_Scorecard.pptx
@@ -3394,7 +3394,7 @@
                         <a:rPr sz="900">
                           <a:latin typeface="Segoe UI"/>
                         </a:rPr>
-                        <a:t>Tier 1  |  9.12% / 15.00%</a:t>
+                        <a:t>Tier 1  |  9.09% / 15.00%</a:t>
                       </a:r>
                     </a:p>
                   </a:txBody>
@@ -3653,7 +3653,7 @@
                         <a:rPr sz="900">
                           <a:latin typeface="Segoe UI"/>
                         </a:rPr>
-                        <a:t>Fleet Subs: 21  |  Binds: 2</a:t>
+                        <a:t>Fleet Subs: 22  |  Binds: 2</a:t>
                       </a:r>
                     </a:p>
                   </a:txBody>
@@ -4428,7 +4428,7 @@
                           </a:solidFill>
                           <a:latin typeface="Segoe UI"/>
                         </a:rPr>
-                        <a:t>55</a:t>
+                        <a:t>56</a:t>
                       </a:r>
                     </a:p>
                   </a:txBody>
@@ -4707,7 +4707,7 @@
                           </a:solidFill>
                           <a:latin typeface="Segoe UI"/>
                         </a:rPr>
-                        <a:t>10.9%</a:t>
+                        <a:t>10.7%</a:t>
                       </a:r>
                     </a:p>
                   </a:txBody>
@@ -4747,7 +4747,7 @@
                         <a:rPr sz="800">
                           <a:latin typeface="Segoe UI"/>
                         </a:rPr>
-                        <a:t>20.7%</a:t>
+                        <a:t>19.5%</a:t>
                       </a:r>
                     </a:p>
                   </a:txBody>
@@ -5020,7 +5020,7 @@
                         <a:rPr sz="800">
                           <a:latin typeface="Segoe UI"/>
                         </a:rPr>
-                        <a:t>18</a:t>
+                        <a:t>17</a:t>
                       </a:r>
                     </a:p>
                   </a:txBody>

--- a/generated/Tier 1 Broker Scorecards/Smart Start_Broker_Scorecard.pptx
+++ b/generated/Tier 1 Broker Scorecards/Smart Start_Broker_Scorecard.pptx
@@ -3690,7 +3690,7 @@
                         <a:rPr sz="900">
                           <a:latin typeface="Segoe UI"/>
                         </a:rPr>
-                        <a:t>Fleet Bound Premium: $222,168.42</a:t>
+                        <a:t>Fleet Bound Premium: $229,575.46</a:t>
                       </a:r>
                     </a:p>
                   </a:txBody>
@@ -3727,7 +3727,7 @@
                         <a:rPr sz="900">
                           <a:latin typeface="Segoe UI"/>
                         </a:rPr>
-                        <a:t>Fleet Book %: 32.2%</a:t>
+                        <a:t>Fleet Book %: 33.3%</a:t>
                       </a:r>
                     </a:p>
                   </a:txBody>
@@ -3803,7 +3803,7 @@
                         <a:rPr sz="900">
                           <a:latin typeface="Segoe UI"/>
                         </a:rPr>
-                        <a:t>Non-Fleet Bound Premium: $467,246.90</a:t>
+                        <a:t>Non-Fleet Bound Premium: $459,839.86</a:t>
                       </a:r>
                     </a:p>
                   </a:txBody>
@@ -3840,7 +3840,7 @@
                         <a:rPr sz="900">
                           <a:latin typeface="Segoe UI"/>
                         </a:rPr>
-                        <a:t>Non-Fleet Book %: 67.8%</a:t>
+                        <a:t>Non-Fleet Book %: 66.7%</a:t>
                       </a:r>
                     </a:p>
                   </a:txBody>
@@ -4747,7 +4747,7 @@
                         <a:rPr sz="800">
                           <a:latin typeface="Segoe UI"/>
                         </a:rPr>
-                        <a:t>19.5%</a:t>
+                        <a:t>20.7%</a:t>
                       </a:r>
                     </a:p>
                   </a:txBody>
@@ -5020,7 +5020,7 @@
                         <a:rPr sz="800">
                           <a:latin typeface="Segoe UI"/>
                         </a:rPr>
-                        <a:t>17</a:t>
+                        <a:t>18</a:t>
                       </a:r>
                     </a:p>
                   </a:txBody>

--- a/generated/Tier 1 Broker Scorecards/Smart Start_Broker_Scorecard.pptx
+++ b/generated/Tier 1 Broker Scorecards/Smart Start_Broker_Scorecard.pptx
@@ -3357,7 +3357,7 @@
                         <a:rPr sz="800">
                           <a:latin typeface="Segoe UI"/>
                         </a:rPr>
-                        <a:t>$1,813,164.60 / $1,953,713.74 / $689,415.32</a:t>
+                        <a:t>$1,813,164.60 / $1,975,288.69 / $710,990.27</a:t>
                       </a:r>
                     </a:p>
                   </a:txBody>
@@ -3394,7 +3394,7 @@
                         <a:rPr sz="900">
                           <a:latin typeface="Segoe UI"/>
                         </a:rPr>
-                        <a:t>Tier 1  |  9.09% / 15.00%</a:t>
+                        <a:t>Tier 1  |  9.34% / 15.00%</a:t>
                       </a:r>
                     </a:p>
                   </a:txBody>
@@ -3431,7 +3431,7 @@
                         <a:rPr sz="900">
                           <a:latin typeface="Segoe UI"/>
                         </a:rPr>
-                        <a:t>$2,538,430.44  (27.2% achieved)</a:t>
+                        <a:t>$2,538,430.44  (28.0% achieved)</a:t>
                       </a:r>
                     </a:p>
                   </a:txBody>
@@ -3690,7 +3690,7 @@
                         <a:rPr sz="900">
                           <a:latin typeface="Segoe UI"/>
                         </a:rPr>
-                        <a:t>Fleet Bound Premium: $229,575.46</a:t>
+                        <a:t>Fleet Bound Premium: $211,636.95</a:t>
                       </a:r>
                     </a:p>
                   </a:txBody>
@@ -3727,7 +3727,7 @@
                         <a:rPr sz="900">
                           <a:latin typeface="Segoe UI"/>
                         </a:rPr>
-                        <a:t>Fleet Book %: 33.3%</a:t>
+                        <a:t>Fleet Book %: 29.8%</a:t>
                       </a:r>
                     </a:p>
                   </a:txBody>
@@ -3766,7 +3766,7 @@
                         <a:rPr sz="900">
                           <a:latin typeface="Segoe UI"/>
                         </a:rPr>
-                        <a:t>Non-Fleet Subs: 264  |  Binds: 24</a:t>
+                        <a:t>Non-Fleet Subs: 267  |  Binds: 25</a:t>
                       </a:r>
                     </a:p>
                   </a:txBody>
@@ -3803,7 +3803,7 @@
                         <a:rPr sz="900">
                           <a:latin typeface="Segoe UI"/>
                         </a:rPr>
-                        <a:t>Non-Fleet Bound Premium: $459,839.86</a:t>
+                        <a:t>Non-Fleet Bound Premium: $499,353.32</a:t>
                       </a:r>
                     </a:p>
                   </a:txBody>
@@ -3840,7 +3840,7 @@
                         <a:rPr sz="900">
                           <a:latin typeface="Segoe UI"/>
                         </a:rPr>
-                        <a:t>Non-Fleet Book %: 66.7%</a:t>
+                        <a:t>Non-Fleet Book %: 70.2%</a:t>
                       </a:r>
                     </a:p>
                   </a:txBody>
@@ -4428,7 +4428,7 @@
                           </a:solidFill>
                           <a:latin typeface="Segoe UI"/>
                         </a:rPr>
-                        <a:t>56</a:t>
+                        <a:t>59</a:t>
                       </a:r>
                     </a:p>
                   </a:txBody>
@@ -4707,7 +4707,7 @@
                           </a:solidFill>
                           <a:latin typeface="Segoe UI"/>
                         </a:rPr>
-                        <a:t>10.7%</a:t>
+                        <a:t>11.9%</a:t>
                       </a:r>
                     </a:p>
                   </a:txBody>
@@ -4747,7 +4747,7 @@
                         <a:rPr sz="800">
                           <a:latin typeface="Segoe UI"/>
                         </a:rPr>
-                        <a:t>20.7%</a:t>
+                        <a:t>19.5%</a:t>
                       </a:r>
                     </a:p>
                   </a:txBody>
@@ -4983,7 +4983,7 @@
                           </a:solidFill>
                           <a:latin typeface="Segoe UI"/>
                         </a:rPr>
-                        <a:t>6</a:t>
+                        <a:t>7</a:t>
                       </a:r>
                     </a:p>
                   </a:txBody>
@@ -5020,7 +5020,7 @@
                         <a:rPr sz="800">
                           <a:latin typeface="Segoe UI"/>
                         </a:rPr>
-                        <a:t>18</a:t>
+                        <a:t>17</a:t>
                       </a:r>
                     </a:p>
                   </a:txBody>
@@ -5262,7 +5262,7 @@
                           </a:solidFill>
                           <a:latin typeface="Segoe UI"/>
                         </a:rPr>
-                        <a:t>$128.6K</a:t>
+                        <a:t>$150.1K</a:t>
                       </a:r>
                     </a:p>
                   </a:txBody>

--- a/generated/Tier 1 Broker Scorecards/Smart Start_Broker_Scorecard.pptx
+++ b/generated/Tier 1 Broker Scorecards/Smart Start_Broker_Scorecard.pptx
@@ -3394,7 +3394,7 @@
                         <a:rPr sz="900">
                           <a:latin typeface="Segoe UI"/>
                         </a:rPr>
-                        <a:t>Tier 1  |  9.34% / 15.00%</a:t>
+                        <a:t>Tier 1  |  9.15% / 15.00%</a:t>
                       </a:r>
                     </a:p>
                   </a:txBody>
@@ -3690,7 +3690,7 @@
                         <a:rPr sz="900">
                           <a:latin typeface="Segoe UI"/>
                         </a:rPr>
-                        <a:t>Fleet Bound Premium: $211,636.95</a:t>
+                        <a:t>Fleet Bound Premium: $207,357.23</a:t>
                       </a:r>
                     </a:p>
                   </a:txBody>
@@ -3727,7 +3727,7 @@
                         <a:rPr sz="900">
                           <a:latin typeface="Segoe UI"/>
                         </a:rPr>
-                        <a:t>Fleet Book %: 29.8%</a:t>
+                        <a:t>Fleet Book %: 29.2%</a:t>
                       </a:r>
                     </a:p>
                   </a:txBody>
@@ -3766,7 +3766,7 @@
                         <a:rPr sz="900">
                           <a:latin typeface="Segoe UI"/>
                         </a:rPr>
-                        <a:t>Non-Fleet Subs: 267  |  Binds: 25</a:t>
+                        <a:t>Non-Fleet Subs: 273  |  Binds: 25</a:t>
                       </a:r>
                     </a:p>
                   </a:txBody>
@@ -3803,7 +3803,7 @@
                         <a:rPr sz="900">
                           <a:latin typeface="Segoe UI"/>
                         </a:rPr>
-                        <a:t>Non-Fleet Bound Premium: $499,353.32</a:t>
+                        <a:t>Non-Fleet Bound Premium: $503,633.04</a:t>
                       </a:r>
                     </a:p>
                   </a:txBody>
@@ -3840,7 +3840,7 @@
                         <a:rPr sz="900">
                           <a:latin typeface="Segoe UI"/>
                         </a:rPr>
-                        <a:t>Non-Fleet Book %: 70.2%</a:t>
+                        <a:t>Non-Fleet Book %: 70.8%</a:t>
                       </a:r>
                     </a:p>
                   </a:txBody>
@@ -4351,7 +4351,7 @@
                           </a:solidFill>
                           <a:latin typeface="Segoe UI"/>
                         </a:rPr>
-                        <a:t>88</a:t>
+                        <a:t>89</a:t>
                       </a:r>
                     </a:p>
                   </a:txBody>
@@ -4428,7 +4428,7 @@
                           </a:solidFill>
                           <a:latin typeface="Segoe UI"/>
                         </a:rPr>
-                        <a:t>59</a:t>
+                        <a:t>61</a:t>
                       </a:r>
                     </a:p>
                   </a:txBody>
@@ -4624,7 +4624,7 @@
                           </a:solidFill>
                           <a:latin typeface="Segoe UI"/>
                         </a:rPr>
-                        <a:t>13.6%</a:t>
+                        <a:t>13.5%</a:t>
                       </a:r>
                     </a:p>
                   </a:txBody>
@@ -4707,7 +4707,7 @@
                           </a:solidFill>
                           <a:latin typeface="Segoe UI"/>
                         </a:rPr>
-                        <a:t>11.9%</a:t>
+                        <a:t>11.5%</a:t>
                       </a:r>
                     </a:p>
                   </a:txBody>

--- a/generated/Tier 1 Broker Scorecards/Smart Start_Broker_Scorecard.pptx
+++ b/generated/Tier 1 Broker Scorecards/Smart Start_Broker_Scorecard.pptx
@@ -3357,7 +3357,7 @@
                         <a:rPr sz="800">
                           <a:latin typeface="Segoe UI"/>
                         </a:rPr>
-                        <a:t>$1,813,164.60 / $1,975,288.69 / $710,990.27</a:t>
+                        <a:t>$1,813,164.60 / $2,006,827.56 / $742,529.14</a:t>
                       </a:r>
                     </a:p>
                   </a:txBody>
@@ -3394,7 +3394,7 @@
                         <a:rPr sz="900">
                           <a:latin typeface="Segoe UI"/>
                         </a:rPr>
-                        <a:t>Tier 1  |  9.15% / 15.00%</a:t>
+                        <a:t>Tier 1  |  9.40% / 15.00%</a:t>
                       </a:r>
                     </a:p>
                   </a:txBody>
@@ -3431,7 +3431,7 @@
                         <a:rPr sz="900">
                           <a:latin typeface="Segoe UI"/>
                         </a:rPr>
-                        <a:t>$2,538,430.44  (28.0% achieved)</a:t>
+                        <a:t>$2,538,430.44  (29.3% achieved)</a:t>
                       </a:r>
                     </a:p>
                   </a:txBody>
@@ -3653,7 +3653,7 @@
                         <a:rPr sz="900">
                           <a:latin typeface="Segoe UI"/>
                         </a:rPr>
-                        <a:t>Fleet Subs: 22  |  Binds: 2</a:t>
+                        <a:t>Fleet Subs: 23  |  Binds: 2</a:t>
                       </a:r>
                     </a:p>
                   </a:txBody>
@@ -3690,7 +3690,7 @@
                         <a:rPr sz="900">
                           <a:latin typeface="Segoe UI"/>
                         </a:rPr>
-                        <a:t>Fleet Bound Premium: $207,357.23</a:t>
+                        <a:t>Fleet Bound Premium: $210,101.99</a:t>
                       </a:r>
                     </a:p>
                   </a:txBody>
@@ -3727,7 +3727,7 @@
                         <a:rPr sz="900">
                           <a:latin typeface="Segoe UI"/>
                         </a:rPr>
-                        <a:t>Fleet Book %: 29.2%</a:t>
+                        <a:t>Fleet Book %: 28.3%</a:t>
                       </a:r>
                     </a:p>
                   </a:txBody>
@@ -3766,7 +3766,7 @@
                         <a:rPr sz="900">
                           <a:latin typeface="Segoe UI"/>
                         </a:rPr>
-                        <a:t>Non-Fleet Subs: 273  |  Binds: 25</a:t>
+                        <a:t>Non-Fleet Subs: 275  |  Binds: 26</a:t>
                       </a:r>
                     </a:p>
                   </a:txBody>
@@ -3803,7 +3803,7 @@
                         <a:rPr sz="900">
                           <a:latin typeface="Segoe UI"/>
                         </a:rPr>
-                        <a:t>Non-Fleet Bound Premium: $503,633.04</a:t>
+                        <a:t>Non-Fleet Bound Premium: $532,427.15</a:t>
                       </a:r>
                     </a:p>
                   </a:txBody>
@@ -3840,7 +3840,7 @@
                         <a:rPr sz="900">
                           <a:latin typeface="Segoe UI"/>
                         </a:rPr>
-                        <a:t>Non-Fleet Book %: 70.8%</a:t>
+                        <a:t>Non-Fleet Book %: 71.7%</a:t>
                       </a:r>
                     </a:p>
                   </a:txBody>
@@ -4428,7 +4428,7 @@
                           </a:solidFill>
                           <a:latin typeface="Segoe UI"/>
                         </a:rPr>
-                        <a:t>61</a:t>
+                        <a:t>64</a:t>
                       </a:r>
                     </a:p>
                   </a:txBody>
@@ -4707,7 +4707,7 @@
                           </a:solidFill>
                           <a:latin typeface="Segoe UI"/>
                         </a:rPr>
-                        <a:t>11.5%</a:t>
+                        <a:t>10.9%</a:t>
                       </a:r>
                     </a:p>
                   </a:txBody>
@@ -4747,7 +4747,7 @@
                         <a:rPr sz="800">
                           <a:latin typeface="Segoe UI"/>
                         </a:rPr>
-                        <a:t>19.5%</a:t>
+                        <a:t>18.4%</a:t>
                       </a:r>
                     </a:p>
                   </a:txBody>
@@ -5020,7 +5020,7 @@
                         <a:rPr sz="800">
                           <a:latin typeface="Segoe UI"/>
                         </a:rPr>
-                        <a:t>17</a:t>
+                        <a:t>16</a:t>
                       </a:r>
                     </a:p>
                   </a:txBody>
@@ -5262,7 +5262,7 @@
                           </a:solidFill>
                           <a:latin typeface="Segoe UI"/>
                         </a:rPr>
-                        <a:t>$150.1K</a:t>
+                        <a:t>$181.7K</a:t>
                       </a:r>
                     </a:p>
                   </a:txBody>

--- a/generated/Tier 1 Broker Scorecards/Smart Start_Broker_Scorecard.pptx
+++ b/generated/Tier 1 Broker Scorecards/Smart Start_Broker_Scorecard.pptx
@@ -3394,7 +3394,7 @@
                         <a:rPr sz="900">
                           <a:latin typeface="Segoe UI"/>
                         </a:rPr>
-                        <a:t>Tier 1  |  9.40% / 15.00%</a:t>
+                        <a:t>Tier 1  |  8.58% / 15.00%</a:t>
                       </a:r>
                     </a:p>
                   </a:txBody>
@@ -3690,7 +3690,7 @@
                         <a:rPr sz="900">
                           <a:latin typeface="Segoe UI"/>
                         </a:rPr>
-                        <a:t>Fleet Bound Premium: $210,101.99</a:t>
+                        <a:t>Fleet Bound Premium: $234,260.94</a:t>
                       </a:r>
                     </a:p>
                   </a:txBody>
@@ -3727,7 +3727,7 @@
                         <a:rPr sz="900">
                           <a:latin typeface="Segoe UI"/>
                         </a:rPr>
-                        <a:t>Fleet Book %: 28.3%</a:t>
+                        <a:t>Fleet Book %: 31.5%</a:t>
                       </a:r>
                     </a:p>
                   </a:txBody>
@@ -3766,7 +3766,7 @@
                         <a:rPr sz="900">
                           <a:latin typeface="Segoe UI"/>
                         </a:rPr>
-                        <a:t>Non-Fleet Subs: 275  |  Binds: 26</a:t>
+                        <a:t>Non-Fleet Subs: 280  |  Binds: 24</a:t>
                       </a:r>
                     </a:p>
                   </a:txBody>
@@ -3803,7 +3803,7 @@
                         <a:rPr sz="900">
                           <a:latin typeface="Segoe UI"/>
                         </a:rPr>
-                        <a:t>Non-Fleet Bound Premium: $532,427.15</a:t>
+                        <a:t>Non-Fleet Bound Premium: $508,268.20</a:t>
                       </a:r>
                     </a:p>
                   </a:txBody>
@@ -3840,7 +3840,7 @@
                         <a:rPr sz="900">
                           <a:latin typeface="Segoe UI"/>
                         </a:rPr>
-                        <a:t>Non-Fleet Book %: 71.7%</a:t>
+                        <a:t>Non-Fleet Book %: 68.5%</a:t>
                       </a:r>
                     </a:p>
                   </a:txBody>
@@ -4428,7 +4428,7 @@
                           </a:solidFill>
                           <a:latin typeface="Segoe UI"/>
                         </a:rPr>
-                        <a:t>64</a:t>
+                        <a:t>68</a:t>
                       </a:r>
                     </a:p>
                   </a:txBody>
@@ -4624,7 +4624,7 @@
                           </a:solidFill>
                           <a:latin typeface="Segoe UI"/>
                         </a:rPr>
-                        <a:t>13.5%</a:t>
+                        <a:t>12.4%</a:t>
                       </a:r>
                     </a:p>
                   </a:txBody>
@@ -4707,7 +4707,7 @@
                           </a:solidFill>
                           <a:latin typeface="Segoe UI"/>
                         </a:rPr>
-                        <a:t>10.9%</a:t>
+                        <a:t>8.8%</a:t>
                       </a:r>
                     </a:p>
                   </a:txBody>
@@ -4747,7 +4747,7 @@
                         <a:rPr sz="800">
                           <a:latin typeface="Segoe UI"/>
                         </a:rPr>
-                        <a:t>18.4%</a:t>
+                        <a:t>20.7%</a:t>
                       </a:r>
                     </a:p>
                   </a:txBody>
@@ -4901,12 +4901,9 @@
                       <a:pPr algn="ctr"/>
                       <a:r>
                         <a:rPr sz="800">
-                          <a:solidFill>
-                            <a:srgbClr val="059669"/>
-                          </a:solidFill>
                           <a:latin typeface="Segoe UI"/>
                         </a:rPr>
-                        <a:t>12</a:t>
+                        <a:t>11</a:t>
                       </a:r>
                     </a:p>
                   </a:txBody>
@@ -4983,7 +4980,7 @@
                           </a:solidFill>
                           <a:latin typeface="Segoe UI"/>
                         </a:rPr>
-                        <a:t>7</a:t>
+                        <a:t>6</a:t>
                       </a:r>
                     </a:p>
                   </a:txBody>
@@ -5020,7 +5017,7 @@
                         <a:rPr sz="800">
                           <a:latin typeface="Segoe UI"/>
                         </a:rPr>
-                        <a:t>16</a:t>
+                        <a:t>18</a:t>
                       </a:r>
                     </a:p>
                   </a:txBody>

--- a/generated/Tier 1 Broker Scorecards/Smart Start_Broker_Scorecard.pptx
+++ b/generated/Tier 1 Broker Scorecards/Smart Start_Broker_Scorecard.pptx
@@ -3394,7 +3394,7 @@
                         <a:rPr sz="900">
                           <a:latin typeface="Segoe UI"/>
                         </a:rPr>
-                        <a:t>Tier 1  |  8.58% / 15.00%</a:t>
+                        <a:t>Tier 1  |  8.91% / 15.00%</a:t>
                       </a:r>
                     </a:p>
                   </a:txBody>
@@ -3690,7 +3690,7 @@
                         <a:rPr sz="900">
                           <a:latin typeface="Segoe UI"/>
                         </a:rPr>
-                        <a:t>Fleet Bound Premium: $234,260.94</a:t>
+                        <a:t>Fleet Bound Premium: $230,863.08</a:t>
                       </a:r>
                     </a:p>
                   </a:txBody>
@@ -3727,7 +3727,7 @@
                         <a:rPr sz="900">
                           <a:latin typeface="Segoe UI"/>
                         </a:rPr>
-                        <a:t>Fleet Book %: 31.5%</a:t>
+                        <a:t>Fleet Book %: 31.1%</a:t>
                       </a:r>
                     </a:p>
                   </a:txBody>
@@ -3766,7 +3766,7 @@
                         <a:rPr sz="900">
                           <a:latin typeface="Segoe UI"/>
                         </a:rPr>
-                        <a:t>Non-Fleet Subs: 280  |  Binds: 24</a:t>
+                        <a:t>Non-Fleet Subs: 280  |  Binds: 25</a:t>
                       </a:r>
                     </a:p>
                   </a:txBody>
@@ -3803,7 +3803,7 @@
                         <a:rPr sz="900">
                           <a:latin typeface="Segoe UI"/>
                         </a:rPr>
-                        <a:t>Non-Fleet Bound Premium: $508,268.20</a:t>
+                        <a:t>Non-Fleet Bound Premium: $511,666.06</a:t>
                       </a:r>
                     </a:p>
                   </a:txBody>
@@ -3840,7 +3840,7 @@
                         <a:rPr sz="900">
                           <a:latin typeface="Segoe UI"/>
                         </a:rPr>
-                        <a:t>Non-Fleet Book %: 68.5%</a:t>
+                        <a:t>Non-Fleet Book %: 68.9%</a:t>
                       </a:r>
                     </a:p>
                   </a:txBody>
@@ -4624,7 +4624,7 @@
                           </a:solidFill>
                           <a:latin typeface="Segoe UI"/>
                         </a:rPr>
-                        <a:t>12.4%</a:t>
+                        <a:t>13.5%</a:t>
                       </a:r>
                     </a:p>
                   </a:txBody>
@@ -4747,7 +4747,7 @@
                         <a:rPr sz="800">
                           <a:latin typeface="Segoe UI"/>
                         </a:rPr>
-                        <a:t>20.7%</a:t>
+                        <a:t>18.4%</a:t>
                       </a:r>
                     </a:p>
                   </a:txBody>
@@ -4901,9 +4901,12 @@
                       <a:pPr algn="ctr"/>
                       <a:r>
                         <a:rPr sz="800">
+                          <a:solidFill>
+                            <a:srgbClr val="059669"/>
+                          </a:solidFill>
                           <a:latin typeface="Segoe UI"/>
                         </a:rPr>
-                        <a:t>11</a:t>
+                        <a:t>12</a:t>
                       </a:r>
                     </a:p>
                   </a:txBody>
@@ -5017,7 +5020,7 @@
                         <a:rPr sz="800">
                           <a:latin typeface="Segoe UI"/>
                         </a:rPr>
-                        <a:t>18</a:t>
+                        <a:t>16</a:t>
                       </a:r>
                     </a:p>
                   </a:txBody>

--- a/generated/Tier 1 Broker Scorecards/Smart Start_Broker_Scorecard.pptx
+++ b/generated/Tier 1 Broker Scorecards/Smart Start_Broker_Scorecard.pptx
@@ -3357,7 +3357,7 @@
                         <a:rPr sz="800">
                           <a:latin typeface="Segoe UI"/>
                         </a:rPr>
-                        <a:t>$1,813,164.60 / $2,006,827.56 / $742,529.14</a:t>
+                        <a:t>$1,813,164.60 / $1,672,156.83 / $742,529.14</a:t>
                       </a:r>
                     </a:p>
                   </a:txBody>
@@ -3690,7 +3690,7 @@
                         <a:rPr sz="900">
                           <a:latin typeface="Segoe UI"/>
                         </a:rPr>
-                        <a:t>Fleet Bound Premium: $230,863.08</a:t>
+                        <a:t>Fleet Bound Premium: $223,176.07</a:t>
                       </a:r>
                     </a:p>
                   </a:txBody>
@@ -3727,7 +3727,7 @@
                         <a:rPr sz="900">
                           <a:latin typeface="Segoe UI"/>
                         </a:rPr>
-                        <a:t>Fleet Book %: 31.1%</a:t>
+                        <a:t>Fleet Book %: 30.1%</a:t>
                       </a:r>
                     </a:p>
                   </a:txBody>
@@ -3803,7 +3803,7 @@
                         <a:rPr sz="900">
                           <a:latin typeface="Segoe UI"/>
                         </a:rPr>
-                        <a:t>Non-Fleet Bound Premium: $511,666.06</a:t>
+                        <a:t>Non-Fleet Bound Premium: $519,353.07</a:t>
                       </a:r>
                     </a:p>
                   </a:txBody>
@@ -3840,7 +3840,7 @@
                         <a:rPr sz="900">
                           <a:latin typeface="Segoe UI"/>
                         </a:rPr>
-                        <a:t>Non-Fleet Book %: 68.9%</a:t>
+                        <a:t>Non-Fleet Book %: 69.9%</a:t>
                       </a:r>
                     </a:p>
                   </a:txBody>
@@ -4747,7 +4747,7 @@
                         <a:rPr sz="800">
                           <a:latin typeface="Segoe UI"/>
                         </a:rPr>
-                        <a:t>18.4%</a:t>
+                        <a:t>19.5%</a:t>
                       </a:r>
                     </a:p>
                   </a:txBody>
@@ -5020,7 +5020,7 @@
                         <a:rPr sz="800">
                           <a:latin typeface="Segoe UI"/>
                         </a:rPr>
-                        <a:t>16</a:t>
+                        <a:t>17</a:t>
                       </a:r>
                     </a:p>
                   </a:txBody>
